--- a/incoming_files/b2a513367_March2026.pptx
+++ b/incoming_files/b2a513367_March2026.pptx
@@ -3525,7 +3525,7 @@
                 <a:latin typeface="Arial" panose="020B0604020202020204" pitchFamily="34" charset="0"/>
                 <a:ea typeface="Times New Roman" panose="02020603050405020304" pitchFamily="18" charset="0"/>
               </a:rPr>
-              <a:t>CAT6 cable run completed by Hawkeye 				03/04/2026</a:t>
+              <a:t>CAT6 cable run completed by Hawkeye						03/04/2026</a:t>
             </a:r>
           </a:p>
           <a:p>
@@ -3541,7 +3541,7 @@
                 <a:latin typeface="Arial" panose="020B0604020202020204" pitchFamily="34" charset="0"/>
                 <a:ea typeface="Times New Roman" panose="02020603050405020304" pitchFamily="18" charset="0"/>
               </a:rPr>
-              <a:t>OTDR testing completed from Hicksville to Syosset , found bad filter 		                                03/09/2026</a:t>
+              <a:t>OTDR bad filter replaced; wavelength tested – green link light confirmed at Hicksville-Syosset						03/13/2026</a:t>
             </a:r>
           </a:p>
           <a:p>
@@ -3557,15 +3557,55 @@
                 <a:latin typeface="Arial" panose="020B0604020202020204" pitchFamily="34" charset="0"/>
                 <a:ea typeface="Times New Roman" panose="02020603050405020304" pitchFamily="18" charset="0"/>
               </a:rPr>
-              <a:t>First batch of IFR(3) have been converted to IFC and uploaded to shared drive	                                03/09/2026</a:t>
-            </a:r>
-          </a:p>
-          <a:p>
+              <a:t>BGP design for corporate connectivity completed by Lee Blackman						03/10/2026</a:t>
+            </a:r>
+          </a:p>
+          <a:p>
+            <a:pPr marL="171450" indent="-171450">
+              <a:buFont typeface="Arial" panose="020B0604020202020204" pitchFamily="34" charset="0"/>
+              <a:buChar char="•"/>
+            </a:pPr>
             <a:r>
               <a:rPr lang="en-US" sz="800" dirty="0">
+                <a:solidFill>
+                  <a:schemeClr val="tx1"/>
+                </a:solidFill>
+                <a:latin typeface="Arial" panose="020B0604020202020204" pitchFamily="34" charset="0"/>
                 <a:ea typeface="Times New Roman" panose="02020603050405020304" pitchFamily="18" charset="0"/>
               </a:rPr>
-              <a:t>	</a:t>
+              <a:t>Fiber termination to the NSP completed by Hawkeye						03/13/2026</a:t>
+            </a:r>
+          </a:p>
+          <a:p>
+            <a:pPr marL="171450" indent="-171450">
+              <a:buFont typeface="Arial" panose="020B0604020202020204" pitchFamily="34" charset="0"/>
+              <a:buChar char="•"/>
+            </a:pPr>
+            <a:r>
+              <a:rPr lang="en-US" sz="800" dirty="0">
+                <a:solidFill>
+                  <a:schemeClr val="tx1"/>
+                </a:solidFill>
+                <a:latin typeface="Arial" panose="020B0604020202020204" pitchFamily="34" charset="0"/>
+                <a:ea typeface="Times New Roman" panose="02020603050405020304" pitchFamily="18" charset="0"/>
+              </a:rPr>
+              <a:t>New batch of IFRs received from Burns &amp; McDonnell						03/13/2026</a:t>
+            </a:r>
+          </a:p>
+          <a:p>
+            <a:pPr marL="171450" indent="-171450">
+              <a:buFont typeface="Arial" panose="020B0604020202020204" pitchFamily="34" charset="0"/>
+              <a:buChar char="•"/>
+            </a:pPr>
+            <a:r>
+              <a:rPr lang="en-US" sz="800" dirty="0">
+                <a:solidFill>
+                  <a:schemeClr val="tx1"/>
+                </a:solidFill>
+                <a:latin typeface="Arial" panose="020B0604020202020204" pitchFamily="34" charset="0"/>
+                <a:ea typeface="Times New Roman" panose="02020603050405020304" pitchFamily="18" charset="0"/>
+              </a:rPr>
+              <a:t>First batch of 3 IFRs converted to IFC and uploaded to shared drive						03/09/2026</a:t>
             </a:r>
           </a:p>
         </p:txBody>
@@ -5760,7 +5800,7 @@
                 <a:latin typeface="Arial" panose="020B0604020202020204" pitchFamily="34" charset="0"/>
                 <a:ea typeface="Times New Roman" panose="02020603050405020304" pitchFamily="18" charset="0"/>
               </a:rPr>
-              <a:t>Spend to date:	 $4,437,070.00 </a:t>
+              <a:t>Spend to date:	 $4,548,505.00 </a:t>
             </a:r>
           </a:p>
           <a:p>
@@ -5777,7 +5817,7 @@
                 <a:latin typeface="Arial" panose="020B0604020202020204" pitchFamily="34" charset="0"/>
                 <a:ea typeface="Times New Roman" panose="02020603050405020304" pitchFamily="18" charset="0"/>
               </a:rPr>
-              <a:t>Estimate to complete:	$2,162,930.00</a:t>
+              <a:t>Estimate to complete:	$2,051,495.00</a:t>
             </a:r>
           </a:p>
           <a:p>
@@ -6138,7 +6178,7 @@
                 <a:latin typeface="Arial" panose="020B0604020202020204" pitchFamily="34" charset="0"/>
                 <a:ea typeface="Times New Roman" panose="02020603050405020304" pitchFamily="18" charset="0"/>
               </a:rPr>
-              <a:t>BGP design for corporate connectivity designed by Lee and will go over it with Corporate team.		 03/10/2026</a:t>
+              <a:t>ILO Connection at Melville and Hicksville for remote server access (Brianna)				03/16/2026</a:t>
             </a:r>
           </a:p>
           <a:p>
@@ -6154,7 +6194,7 @@
                 <a:latin typeface="Arial" panose="020B0604020202020204" pitchFamily="34" charset="0"/>
                 <a:ea typeface="Times New Roman" panose="02020603050405020304" pitchFamily="18" charset="0"/>
               </a:rPr>
-              <a:t>Receiving new set of IFRs on 03/13		                           		                                 03/13/2026 </a:t>
+              <a:t>BGP Corporate team approval and complete remote router configuration				03/20/2026</a:t>
             </a:r>
           </a:p>
           <a:p>
@@ -6170,7 +6210,7 @@
                 <a:latin typeface="Arial" panose="020B0604020202020204" pitchFamily="34" charset="0"/>
                 <a:ea typeface="Times New Roman" panose="02020603050405020304" pitchFamily="18" charset="0"/>
               </a:rPr>
-              <a:t>Fiber termination to the NSP will be completed by 3/13 by Hawkeye.		                                 03/13/2026</a:t>
+              <a:t>Northport DC fuse/relay issue resolution by Hawkeye and relay tech				03/20/2026</a:t>
             </a:r>
           </a:p>
           <a:p>
@@ -6186,10 +6226,14 @@
                 <a:latin typeface="Arial" panose="020B0604020202020204" pitchFamily="34" charset="0"/>
                 <a:ea typeface="Times New Roman" panose="02020603050405020304" pitchFamily="18" charset="0"/>
               </a:rPr>
-              <a:t>ILO Connection needed in Melville; Brianna will handle Hicksville (Allows remote connectivity from</a:t>
-            </a:r>
-          </a:p>
-          <a:p>
+              <a:t>Nokia NSP remote access setup upon ILO and BGP completion				03/27/2026</a:t>
+            </a:r>
+          </a:p>
+          <a:p>
+            <a:pPr marL="171450" indent="-171450">
+              <a:buFont typeface="Arial" panose="020B0604020202020204" pitchFamily="34" charset="0"/>
+              <a:buChar char="•"/>
+            </a:pPr>
             <a:r>
               <a:rPr lang="en-US" sz="800" dirty="0">
                 <a:solidFill>
@@ -6198,7 +6242,7 @@
                 <a:latin typeface="Arial" panose="020B0604020202020204" pitchFamily="34" charset="0"/>
                 <a:ea typeface="Times New Roman" panose="02020603050405020304" pitchFamily="18" charset="0"/>
               </a:rPr>
-              <a:t>      corporate directly into the managed servers)		                                                                 03/16/2026</a:t>
+              <a:t>Phase 2 IFR to IFC conversions – next batch submission to Burns &amp; McDonnell				03/27/2026</a:t>
             </a:r>
           </a:p>
         </p:txBody>
@@ -7158,7 +7202,7 @@
                 <a:latin typeface="Arial" panose="020B0604020202020204" pitchFamily="34" charset="0"/>
                 <a:ea typeface="Times New Roman" panose="02020603050405020304" pitchFamily="18" charset="0"/>
               </a:rPr>
-              <a:t>CAT6 cable run completed on 03/04</a:t>
+              <a:t>CAT6 cable run completed at Hicksville on 03/04.</a:t>
             </a:r>
           </a:p>
           <a:p>
@@ -7180,7 +7224,7 @@
                 <a:latin typeface="Arial" panose="020B0604020202020204" pitchFamily="34" charset="0"/>
                 <a:ea typeface="Times New Roman" panose="02020603050405020304" pitchFamily="18" charset="0"/>
               </a:rPr>
-              <a:t>Fiber termination to the NSP will be completed by 3/13 by Hawkeye.</a:t>
+              <a:t>OTDR bad filter replaced; wavelength tested – confirmed green link light at Hicksville-Syosset on 03/13.</a:t>
             </a:r>
           </a:p>
           <a:p>
@@ -7202,7 +7246,7 @@
                 <a:latin typeface="Arial" panose="020B0604020202020204" pitchFamily="34" charset="0"/>
                 <a:ea typeface="Times New Roman" panose="02020603050405020304" pitchFamily="18" charset="0"/>
               </a:rPr>
-              <a:t>BGP design for corporate connectivity designed by Lee and will go over it with team on - 3/10</a:t>
+              <a:t>Fiber termination to the NSP completed by Hawkeye on 03/13.</a:t>
             </a:r>
           </a:p>
           <a:p>
@@ -7224,7 +7268,7 @@
                 <a:latin typeface="Arial" panose="020B0604020202020204" pitchFamily="34" charset="0"/>
                 <a:ea typeface="Times New Roman" panose="02020603050405020304" pitchFamily="18" charset="0"/>
               </a:rPr>
-              <a:t> Hawkeye is meeting with relay tech to complete the DC issue at Northport, since the fuse keeps tripping. </a:t>
+              <a:t>BGP design for corporate connectivity completed by Lee Blackman on 03/10; awaiting Corporate approval.</a:t>
             </a:r>
           </a:p>
           <a:p>
@@ -7246,25 +7290,66 @@
                 <a:latin typeface="Arial" panose="020B0604020202020204" pitchFamily="34" charset="0"/>
                 <a:ea typeface="Times New Roman" panose="02020603050405020304" pitchFamily="18" charset="0"/>
               </a:rPr>
-              <a:t>Receiving new set of IFRs on 03/13</a:t>
-            </a:r>
-            <a:endParaRPr lang="en-US" sz="800" dirty="0">
-              <a:solidFill>
-                <a:schemeClr val="tx1"/>
-              </a:solidFill>
-            </a:endParaRPr>
-          </a:p>
-          <a:p>
-            <a:pPr>
+              <a:t>First batch of 3 IFRs converted to IFC and uploaded to shared drive on 03/09.</a:t>
+            </a:r>
+          </a:p>
+          <a:p>
+            <a:pPr marL="171450" indent="-171450" algn="l" defTabSz="914400" rtl="0" eaLnBrk="1" latinLnBrk="0" hangingPunct="1">
               <a:spcAft>
                 <a:spcPts val="300"/>
               </a:spcAft>
+              <a:buFont typeface="Arial" panose="020B0604020202020204" pitchFamily="34" charset="0"/>
+              <a:buChar char="•"/>
               <a:tabLst>
                 <a:tab pos="2057400" algn="r"/>
               </a:tabLst>
             </a:pPr>
             <a:r>
-              <a:rPr lang="en-US" sz="1000" b="1" u="sng" dirty="0">
+              <a:rPr lang="en-US" sz="800" kern="1200" dirty="0">
+                <a:solidFill>
+                  <a:schemeClr val="tx1"/>
+                </a:solidFill>
+                <a:latin typeface="Arial" panose="020B0604020202020204" pitchFamily="34" charset="0"/>
+                <a:ea typeface="Times New Roman" panose="02020603050405020304" pitchFamily="18" charset="0"/>
+              </a:rPr>
+              <a:t>New batch of IFRs received from Burns &amp; McDonnell on 03/13.</a:t>
+            </a:r>
+          </a:p>
+          <a:p>
+            <a:pPr marL="171450" indent="-171450" algn="l" defTabSz="914400" rtl="0" eaLnBrk="1" latinLnBrk="0" hangingPunct="1">
+              <a:spcAft>
+                <a:spcPts val="300"/>
+              </a:spcAft>
+              <a:buFont typeface="Arial" panose="020B0604020202020204" pitchFamily="34" charset="0"/>
+              <a:buChar char="•"/>
+              <a:tabLst>
+                <a:tab pos="2057400" algn="r"/>
+              </a:tabLst>
+            </a:pPr>
+            <a:r>
+              <a:rPr lang="en-US" sz="800" kern="1200" dirty="0">
+                <a:solidFill>
+                  <a:schemeClr val="tx1"/>
+                </a:solidFill>
+                <a:latin typeface="Arial" panose="020B0604020202020204" pitchFamily="34" charset="0"/>
+                <a:ea typeface="Times New Roman" panose="02020603050405020304" pitchFamily="18" charset="0"/>
+              </a:rPr>
+              <a:t>Hawkeye engaged relay tech to resolve DC fuse tripping issue at Northport – in progress.</a:t>
+            </a:r>
+          </a:p>
+          <a:p>
+            <a:pPr marL="171450" indent="-171450" algn="l" defTabSz="914400" rtl="0" eaLnBrk="1" latinLnBrk="0" hangingPunct="1">
+              <a:spcAft>
+                <a:spcPts val="300"/>
+              </a:spcAft>
+              <a:buFont typeface="Arial" panose="020B0604020202020204" pitchFamily="34" charset="0"/>
+              <a:buChar char="•"/>
+              <a:tabLst>
+                <a:tab pos="2057400" algn="r"/>
+              </a:tabLst>
+            </a:pPr>
+            <a:r>
+              <a:rPr lang="en-US" sz="800" kern="1200" dirty="0">
                 <a:solidFill>
                   <a:schemeClr val="tx1"/>
                 </a:solidFill>
@@ -7275,32 +7360,26 @@
             </a:r>
           </a:p>
           <a:p>
-            <a:pPr>
+            <a:pPr marL="171450" indent="-171450" algn="l" defTabSz="914400" rtl="0" eaLnBrk="1" latinLnBrk="0" hangingPunct="1">
               <a:spcAft>
                 <a:spcPts val="300"/>
               </a:spcAft>
+              <a:buFont typeface="Arial" panose="020B0604020202020204" pitchFamily="34" charset="0"/>
+              <a:buChar char="•"/>
               <a:tabLst>
-                <a:tab pos="4857750" algn="r"/>
+                <a:tab pos="2057400" algn="r"/>
               </a:tabLst>
             </a:pPr>
             <a:r>
-              <a:rPr lang="en-US" sz="800" dirty="0">
+              <a:rPr lang="en-US" sz="800" kern="1200" dirty="0">
                 <a:solidFill>
                   <a:schemeClr val="tx1"/>
                 </a:solidFill>
                 <a:latin typeface="Arial" panose="020B0604020202020204" pitchFamily="34" charset="0"/>
                 <a:ea typeface="Times New Roman" panose="02020603050405020304" pitchFamily="18" charset="0"/>
-                <a:cs typeface="Arial" panose="020B0604020202020204" pitchFamily="34" charset="0"/>
               </a:rPr>
-              <a:t>Schedule : Plan to complete all the remote configuration of the routers and complete testing to bring the schedule back to green</a:t>
-            </a:r>
-            <a:endParaRPr lang="en-US" sz="800" dirty="0">
-              <a:solidFill>
-                <a:schemeClr val="tx1"/>
-              </a:solidFill>
-              <a:latin typeface="Arial" panose="020B0604020202020204" pitchFamily="34" charset="0"/>
-              <a:ea typeface="Times New Roman" panose="02020603050405020304" pitchFamily="18" charset="0"/>
-            </a:endParaRPr>
+              <a:t>Schedule (Yellow): 3-week delay. Recovery: BGP Corporate approval + remote router configuration to restore Green.</a:t>
+            </a:r>
           </a:p>
         </p:txBody>
       </p:sp>

--- a/incoming_files/b2a513367_March2026.pptx
+++ b/incoming_files/b2a513367_March2026.pptx
@@ -3606,6 +3606,38 @@
                 <a:ea typeface="Times New Roman" panose="02020603050405020304" pitchFamily="18" charset="0"/>
               </a:rPr>
               <a:t>First batch of 3 IFRs converted to IFC and uploaded to shared drive						03/09/2026</a:t>
+            </a:r>
+          </a:p>
+          <a:p>
+            <a:pPr marL="171450" indent="-171450">
+              <a:buFont typeface="Arial" panose="020B0604020202020204" pitchFamily="34" charset="0"/>
+              <a:buChar char="•"/>
+            </a:pPr>
+            <a:r>
+              <a:rPr lang="en-US" sz="800" dirty="0">
+                <a:solidFill>
+                  <a:schemeClr val="tx1"/>
+                </a:solidFill>
+                <a:latin typeface="Arial" panose="020B0604020202020204" pitchFamily="34" charset="0"/>
+                <a:ea typeface="Times New Roman" panose="02020603050405020304" pitchFamily="18" charset="0"/>
+              </a:rPr>
+              <a:t>IFR received for 6S Kings Hwy						03/13/2026</a:t>
+            </a:r>
+          </a:p>
+          <a:p>
+            <a:pPr marL="171450" indent="-171450">
+              <a:buFont typeface="Arial" panose="020B0604020202020204" pitchFamily="34" charset="0"/>
+              <a:buChar char="•"/>
+            </a:pPr>
+            <a:r>
+              <a:rPr lang="en-US" sz="800" dirty="0">
+                <a:solidFill>
+                  <a:schemeClr val="tx1"/>
+                </a:solidFill>
+                <a:latin typeface="Arial" panose="020B0604020202020204" pitchFamily="34" charset="0"/>
+                <a:ea typeface="Times New Roman" panose="02020603050405020304" pitchFamily="18" charset="0"/>
+              </a:rPr>
+              <a:t>IFR received for 7BH Bohemia						03/13/2026</a:t>
             </a:r>
           </a:p>
         </p:txBody>
@@ -7356,6 +7388,50 @@
                 <a:latin typeface="Arial" panose="020B0604020202020204" pitchFamily="34" charset="0"/>
                 <a:ea typeface="Times New Roman" panose="02020603050405020304" pitchFamily="18" charset="0"/>
               </a:rPr>
+              <a:t>IFR received for 6S Kings Hwy on 03/13.</a:t>
+            </a:r>
+          </a:p>
+          <a:p>
+            <a:pPr marL="171450" indent="-171450" algn="l" defTabSz="914400" rtl="0" eaLnBrk="1" latinLnBrk="0" hangingPunct="1">
+              <a:spcAft>
+                <a:spcPts val="300"/>
+              </a:spcAft>
+              <a:buFont typeface="Arial" panose="020B0604020202020204" pitchFamily="34" charset="0"/>
+              <a:buChar char="•"/>
+              <a:tabLst>
+                <a:tab pos="2057400" algn="r"/>
+              </a:tabLst>
+            </a:pPr>
+            <a:r>
+              <a:rPr lang="en-US" sz="800" kern="1200" dirty="0">
+                <a:solidFill>
+                  <a:schemeClr val="tx1"/>
+                </a:solidFill>
+                <a:latin typeface="Arial" panose="020B0604020202020204" pitchFamily="34" charset="0"/>
+                <a:ea typeface="Times New Roman" panose="02020603050405020304" pitchFamily="18" charset="0"/>
+              </a:rPr>
+              <a:t>IFR received for 7BH Bohemia on 03/13.</a:t>
+            </a:r>
+          </a:p>
+          <a:p>
+            <a:pPr marL="171450" indent="-171450" algn="l" defTabSz="914400" rtl="0" eaLnBrk="1" latinLnBrk="0" hangingPunct="1">
+              <a:spcAft>
+                <a:spcPts val="300"/>
+              </a:spcAft>
+              <a:buFont typeface="Arial" panose="020B0604020202020204" pitchFamily="34" charset="0"/>
+              <a:buChar char="•"/>
+              <a:tabLst>
+                <a:tab pos="2057400" algn="r"/>
+              </a:tabLst>
+            </a:pPr>
+            <a:r>
+              <a:rPr lang="en-US" sz="800" kern="1200" dirty="0">
+                <a:solidFill>
+                  <a:schemeClr val="tx1"/>
+                </a:solidFill>
+                <a:latin typeface="Arial" panose="020B0604020202020204" pitchFamily="34" charset="0"/>
+                <a:ea typeface="Times New Roman" panose="02020603050405020304" pitchFamily="18" charset="0"/>
+              </a:rPr>
               <a:t>Remediation (For Non-Green Statuses)</a:t>
             </a:r>
           </a:p>
